--- a/message-chains.pptx
+++ b/message-chains.pptx
@@ -123,6 +123,22 @@
       </a:defRPr>
     </a:lvl9pPr>
   </p:defaultTextStyle>
+  <p:extLst>
+    <p:ext uri="{EFAFB233-063F-42B5-8137-9DF3F51BA10A}">
+      <p15:sldGuideLst xmlns:p15="http://schemas.microsoft.com/office/powerpoint/2012/main">
+        <p15:guide id="1" orient="horz" pos="2160">
+          <p15:clr>
+            <a:srgbClr val="A4A3A4"/>
+          </p15:clr>
+        </p15:guide>
+        <p15:guide id="2" pos="2880">
+          <p15:clr>
+            <a:srgbClr val="A4A3A4"/>
+          </p15:clr>
+        </p15:guide>
+      </p15:sldGuideLst>
+    </p:ext>
+  </p:extLst>
 </p:presentation>
 </file>
 
@@ -236,7 +252,7 @@
             <a:fld id="{56FF66BB-58F6-4A37-8208-0812DDE6C8EF}" type="datetimeFigureOut">
               <a:rPr lang="el-GR" smtClean="0"/>
               <a:pPr/>
-              <a:t>14/12/2020</a:t>
+              <a:t>11/12/2024</a:t>
             </a:fld>
             <a:endParaRPr lang="el-GR"/>
           </a:p>
@@ -310,6 +326,11 @@
         </p:txBody>
       </p:sp>
     </p:spTree>
+    <p:extLst>
+      <p:ext uri="{BB962C8B-B14F-4D97-AF65-F5344CB8AC3E}">
+        <p14:creationId xmlns:p14="http://schemas.microsoft.com/office/powerpoint/2010/main" val="1"/>
+      </p:ext>
+    </p:extLst>
   </p:cSld>
   <p:clrMap bg1="lt1" tx1="dk1" bg2="lt2" tx2="dk2" accent1="accent1" accent2="accent2" accent3="accent3" accent4="accent4" accent5="accent5" accent6="accent6" hlink="hlink" folHlink="folHlink"/>
 </p:handoutMaster>
@@ -398,7 +419,7 @@
             <a:fld id="{DC17DF70-03C8-4BDB-82BF-9C076E474B74}" type="datetimeFigureOut">
               <a:rPr lang="el-GR" smtClean="0"/>
               <a:pPr/>
-              <a:t>14/12/2020</a:t>
+              <a:t>11/12/2024</a:t>
             </a:fld>
             <a:endParaRPr lang="el-GR"/>
           </a:p>
@@ -464,35 +485,35 @@
           <a:p>
             <a:pPr lvl="0"/>
             <a:r>
-              <a:rPr lang="en-US" smtClean="0"/>
+              <a:rPr lang="en-US"/>
               <a:t>Click to edit Master text styles</a:t>
             </a:r>
           </a:p>
           <a:p>
             <a:pPr lvl="1"/>
             <a:r>
-              <a:rPr lang="en-US" smtClean="0"/>
+              <a:rPr lang="en-US"/>
               <a:t>Second level</a:t>
             </a:r>
           </a:p>
           <a:p>
             <a:pPr lvl="2"/>
             <a:r>
-              <a:rPr lang="en-US" smtClean="0"/>
+              <a:rPr lang="en-US"/>
               <a:t>Third level</a:t>
             </a:r>
           </a:p>
           <a:p>
             <a:pPr lvl="3"/>
             <a:r>
-              <a:rPr lang="en-US" smtClean="0"/>
+              <a:rPr lang="en-US"/>
               <a:t>Fourth level</a:t>
             </a:r>
           </a:p>
           <a:p>
             <a:pPr lvl="4"/>
             <a:r>
-              <a:rPr lang="en-US" smtClean="0"/>
+              <a:rPr lang="en-US"/>
               <a:t>Fifth level</a:t>
             </a:r>
             <a:endParaRPr lang="el-GR"/>
@@ -711,11 +732,11 @@
           <a:lstStyle/>
           <a:p>
             <a:r>
-              <a:rPr lang="en-US" dirty="0" smtClean="0"/>
+              <a:rPr lang="en-US" dirty="0"/>
               <a:t>Draw the case where the regular class becomes</a:t>
             </a:r>
             <a:r>
-              <a:rPr lang="en-US" baseline="0" dirty="0" smtClean="0"/>
+              <a:rPr lang="en-US" baseline="0" dirty="0"/>
               <a:t> middle man</a:t>
             </a:r>
             <a:endParaRPr lang="en-US" dirty="0"/>
@@ -800,10 +821,9 @@
           </a:lstStyle>
           <a:p>
             <a:r>
-              <a:rPr kumimoji="0" lang="en-US" smtClean="0"/>
+              <a:rPr kumimoji="0" lang="en-US"/>
               <a:t>Click to edit Master title style</a:t>
             </a:r>
-            <a:endParaRPr kumimoji="0" lang="en-US"/>
           </a:p>
         </p:txBody>
       </p:sp>
@@ -864,10 +884,9 @@
           </a:lstStyle>
           <a:p>
             <a:r>
-              <a:rPr kumimoji="0" lang="en-US" smtClean="0"/>
+              <a:rPr kumimoji="0" lang="en-US"/>
               <a:t>Click to edit Master subtitle style</a:t>
             </a:r>
-            <a:endParaRPr kumimoji="0" lang="en-US"/>
           </a:p>
         </p:txBody>
       </p:sp>
@@ -898,7 +917,7 @@
             <a:fld id="{1D8BD707-D9CF-40AE-B4C6-C98DA3205C09}" type="datetimeFigureOut">
               <a:rPr lang="en-US" smtClean="0"/>
               <a:pPr/>
-              <a:t>12/14/2020</a:t>
+              <a:t>12/11/2024</a:t>
             </a:fld>
             <a:endParaRPr lang="en-US"/>
           </a:p>
@@ -1182,10 +1201,9 @@
           <a:lstStyle/>
           <a:p>
             <a:r>
-              <a:rPr kumimoji="0" lang="en-US" smtClean="0"/>
+              <a:rPr kumimoji="0" lang="en-US"/>
               <a:t>Click to edit Master title style</a:t>
             </a:r>
-            <a:endParaRPr kumimoji="0" lang="en-US"/>
           </a:p>
         </p:txBody>
       </p:sp>
@@ -1206,35 +1224,35 @@
           <a:p>
             <a:pPr lvl="0" eaLnBrk="1" latinLnBrk="0" hangingPunct="1"/>
             <a:r>
-              <a:rPr lang="en-US" smtClean="0"/>
+              <a:rPr lang="en-US"/>
               <a:t>Click to edit Master text styles</a:t>
             </a:r>
           </a:p>
           <a:p>
             <a:pPr lvl="1" eaLnBrk="1" latinLnBrk="0" hangingPunct="1"/>
             <a:r>
-              <a:rPr lang="en-US" smtClean="0"/>
+              <a:rPr lang="en-US"/>
               <a:t>Second level</a:t>
             </a:r>
           </a:p>
           <a:p>
             <a:pPr lvl="2" eaLnBrk="1" latinLnBrk="0" hangingPunct="1"/>
             <a:r>
-              <a:rPr lang="en-US" smtClean="0"/>
+              <a:rPr lang="en-US"/>
               <a:t>Third level</a:t>
             </a:r>
           </a:p>
           <a:p>
             <a:pPr lvl="3" eaLnBrk="1" latinLnBrk="0" hangingPunct="1"/>
             <a:r>
-              <a:rPr lang="en-US" smtClean="0"/>
+              <a:rPr lang="en-US"/>
               <a:t>Fourth level</a:t>
             </a:r>
           </a:p>
           <a:p>
             <a:pPr lvl="4" eaLnBrk="1" latinLnBrk="0" hangingPunct="1"/>
             <a:r>
-              <a:rPr lang="en-US" smtClean="0"/>
+              <a:rPr lang="en-US"/>
               <a:t>Fifth level</a:t>
             </a:r>
             <a:endParaRPr kumimoji="0" lang="en-US"/>
@@ -1259,7 +1277,7 @@
             <a:fld id="{1D8BD707-D9CF-40AE-B4C6-C98DA3205C09}" type="datetimeFigureOut">
               <a:rPr lang="en-US" smtClean="0"/>
               <a:pPr/>
-              <a:t>12/14/2020</a:t>
+              <a:t>12/11/2024</a:t>
             </a:fld>
             <a:endParaRPr lang="en-US"/>
           </a:p>
@@ -1354,10 +1372,9 @@
           <a:lstStyle/>
           <a:p>
             <a:r>
-              <a:rPr kumimoji="0" lang="en-US" smtClean="0"/>
+              <a:rPr kumimoji="0" lang="en-US"/>
               <a:t>Click to edit Master title style</a:t>
             </a:r>
-            <a:endParaRPr kumimoji="0" lang="en-US"/>
           </a:p>
         </p:txBody>
       </p:sp>
@@ -1383,35 +1400,35 @@
           <a:p>
             <a:pPr lvl="0" eaLnBrk="1" latinLnBrk="0" hangingPunct="1"/>
             <a:r>
-              <a:rPr lang="en-US" smtClean="0"/>
+              <a:rPr lang="en-US"/>
               <a:t>Click to edit Master text styles</a:t>
             </a:r>
           </a:p>
           <a:p>
             <a:pPr lvl="1" eaLnBrk="1" latinLnBrk="0" hangingPunct="1"/>
             <a:r>
-              <a:rPr lang="en-US" smtClean="0"/>
+              <a:rPr lang="en-US"/>
               <a:t>Second level</a:t>
             </a:r>
           </a:p>
           <a:p>
             <a:pPr lvl="2" eaLnBrk="1" latinLnBrk="0" hangingPunct="1"/>
             <a:r>
-              <a:rPr lang="en-US" smtClean="0"/>
+              <a:rPr lang="en-US"/>
               <a:t>Third level</a:t>
             </a:r>
           </a:p>
           <a:p>
             <a:pPr lvl="3" eaLnBrk="1" latinLnBrk="0" hangingPunct="1"/>
             <a:r>
-              <a:rPr lang="en-US" smtClean="0"/>
+              <a:rPr lang="en-US"/>
               <a:t>Fourth level</a:t>
             </a:r>
           </a:p>
           <a:p>
             <a:pPr lvl="4" eaLnBrk="1" latinLnBrk="0" hangingPunct="1"/>
             <a:r>
-              <a:rPr lang="en-US" smtClean="0"/>
+              <a:rPr lang="en-US"/>
               <a:t>Fifth level</a:t>
             </a:r>
             <a:endParaRPr kumimoji="0" lang="en-US"/>
@@ -1436,7 +1453,7 @@
             <a:fld id="{1D8BD707-D9CF-40AE-B4C6-C98DA3205C09}" type="datetimeFigureOut">
               <a:rPr lang="en-US" smtClean="0"/>
               <a:pPr/>
-              <a:t>12/14/2020</a:t>
+              <a:t>12/11/2024</a:t>
             </a:fld>
             <a:endParaRPr lang="en-US"/>
           </a:p>
@@ -1648,10 +1665,9 @@
           <a:lstStyle/>
           <a:p>
             <a:r>
-              <a:rPr kumimoji="0" lang="en-US" smtClean="0"/>
+              <a:rPr kumimoji="0" lang="en-US"/>
               <a:t>Click to edit Master title style</a:t>
             </a:r>
-            <a:endParaRPr kumimoji="0" lang="en-US"/>
           </a:p>
         </p:txBody>
       </p:sp>
@@ -1673,7 +1689,7 @@
             <a:fld id="{1D8BD707-D9CF-40AE-B4C6-C98DA3205C09}" type="datetimeFigureOut">
               <a:rPr lang="en-US" smtClean="0"/>
               <a:pPr/>
-              <a:t>12/14/2020</a:t>
+              <a:t>12/11/2024</a:t>
             </a:fld>
             <a:endParaRPr lang="en-US"/>
           </a:p>
@@ -1744,35 +1760,35 @@
           <a:p>
             <a:pPr lvl="0" eaLnBrk="1" latinLnBrk="0" hangingPunct="1"/>
             <a:r>
-              <a:rPr lang="en-US" smtClean="0"/>
+              <a:rPr lang="en-US"/>
               <a:t>Click to edit Master text styles</a:t>
             </a:r>
           </a:p>
           <a:p>
             <a:pPr lvl="1" eaLnBrk="1" latinLnBrk="0" hangingPunct="1"/>
             <a:r>
-              <a:rPr lang="en-US" smtClean="0"/>
+              <a:rPr lang="en-US"/>
               <a:t>Second level</a:t>
             </a:r>
           </a:p>
           <a:p>
             <a:pPr lvl="2" eaLnBrk="1" latinLnBrk="0" hangingPunct="1"/>
             <a:r>
-              <a:rPr lang="en-US" smtClean="0"/>
+              <a:rPr lang="en-US"/>
               <a:t>Third level</a:t>
             </a:r>
           </a:p>
           <a:p>
             <a:pPr lvl="3" eaLnBrk="1" latinLnBrk="0" hangingPunct="1"/>
             <a:r>
-              <a:rPr lang="en-US" smtClean="0"/>
+              <a:rPr lang="en-US"/>
               <a:t>Fourth level</a:t>
             </a:r>
           </a:p>
           <a:p>
             <a:pPr lvl="4" eaLnBrk="1" latinLnBrk="0" hangingPunct="1"/>
             <a:r>
-              <a:rPr lang="en-US" smtClean="0"/>
+              <a:rPr lang="en-US"/>
               <a:t>Fifth level</a:t>
             </a:r>
             <a:endParaRPr kumimoji="0" lang="en-US"/>
@@ -1830,10 +1846,9 @@
           </a:lstStyle>
           <a:p>
             <a:r>
-              <a:rPr kumimoji="0" lang="en-US" smtClean="0"/>
+              <a:rPr kumimoji="0" lang="en-US"/>
               <a:t>Click to edit Master title style</a:t>
             </a:r>
-            <a:endParaRPr kumimoji="0" lang="en-US"/>
           </a:p>
         </p:txBody>
       </p:sp>
@@ -1910,7 +1925,7 @@
           <a:p>
             <a:pPr lvl="0" eaLnBrk="1" latinLnBrk="0" hangingPunct="1"/>
             <a:r>
-              <a:rPr kumimoji="0" lang="en-US" smtClean="0"/>
+              <a:rPr kumimoji="0" lang="en-US"/>
               <a:t>Click to edit Master text styles</a:t>
             </a:r>
           </a:p>
@@ -1939,7 +1954,7 @@
             <a:fld id="{1D8BD707-D9CF-40AE-B4C6-C98DA3205C09}" type="datetimeFigureOut">
               <a:rPr lang="en-US" smtClean="0"/>
               <a:pPr/>
-              <a:t>12/14/2020</a:t>
+              <a:t>12/11/2024</a:t>
             </a:fld>
             <a:endParaRPr lang="en-US"/>
           </a:p>
@@ -2136,10 +2151,9 @@
           <a:lstStyle/>
           <a:p>
             <a:r>
-              <a:rPr kumimoji="0" lang="en-US" smtClean="0"/>
+              <a:rPr kumimoji="0" lang="en-US"/>
               <a:t>Click to edit Master title style</a:t>
             </a:r>
-            <a:endParaRPr kumimoji="0" lang="en-US"/>
           </a:p>
         </p:txBody>
       </p:sp>
@@ -2161,7 +2175,7 @@
             <a:fld id="{1D8BD707-D9CF-40AE-B4C6-C98DA3205C09}" type="datetimeFigureOut">
               <a:rPr lang="en-US" smtClean="0"/>
               <a:pPr/>
-              <a:t>12/14/2020</a:t>
+              <a:t>12/11/2024</a:t>
             </a:fld>
             <a:endParaRPr lang="en-US"/>
           </a:p>
@@ -2232,35 +2246,35 @@
           <a:p>
             <a:pPr lvl="0" eaLnBrk="1" latinLnBrk="0" hangingPunct="1"/>
             <a:r>
-              <a:rPr lang="en-US" smtClean="0"/>
+              <a:rPr lang="en-US"/>
               <a:t>Click to edit Master text styles</a:t>
             </a:r>
           </a:p>
           <a:p>
             <a:pPr lvl="1" eaLnBrk="1" latinLnBrk="0" hangingPunct="1"/>
             <a:r>
-              <a:rPr lang="en-US" smtClean="0"/>
+              <a:rPr lang="en-US"/>
               <a:t>Second level</a:t>
             </a:r>
           </a:p>
           <a:p>
             <a:pPr lvl="2" eaLnBrk="1" latinLnBrk="0" hangingPunct="1"/>
             <a:r>
-              <a:rPr lang="en-US" smtClean="0"/>
+              <a:rPr lang="en-US"/>
               <a:t>Third level</a:t>
             </a:r>
           </a:p>
           <a:p>
             <a:pPr lvl="3" eaLnBrk="1" latinLnBrk="0" hangingPunct="1"/>
             <a:r>
-              <a:rPr lang="en-US" smtClean="0"/>
+              <a:rPr lang="en-US"/>
               <a:t>Fourth level</a:t>
             </a:r>
           </a:p>
           <a:p>
             <a:pPr lvl="4" eaLnBrk="1" latinLnBrk="0" hangingPunct="1"/>
             <a:r>
-              <a:rPr lang="en-US" smtClean="0"/>
+              <a:rPr lang="en-US"/>
               <a:t>Fifth level</a:t>
             </a:r>
             <a:endParaRPr kumimoji="0" lang="en-US"/>
@@ -2289,35 +2303,35 @@
           <a:p>
             <a:pPr lvl="0" eaLnBrk="1" latinLnBrk="0" hangingPunct="1"/>
             <a:r>
-              <a:rPr lang="en-US" smtClean="0"/>
+              <a:rPr lang="en-US"/>
               <a:t>Click to edit Master text styles</a:t>
             </a:r>
           </a:p>
           <a:p>
             <a:pPr lvl="1" eaLnBrk="1" latinLnBrk="0" hangingPunct="1"/>
             <a:r>
-              <a:rPr lang="en-US" smtClean="0"/>
+              <a:rPr lang="en-US"/>
               <a:t>Second level</a:t>
             </a:r>
           </a:p>
           <a:p>
             <a:pPr lvl="2" eaLnBrk="1" latinLnBrk="0" hangingPunct="1"/>
             <a:r>
-              <a:rPr lang="en-US" smtClean="0"/>
+              <a:rPr lang="en-US"/>
               <a:t>Third level</a:t>
             </a:r>
           </a:p>
           <a:p>
             <a:pPr lvl="3" eaLnBrk="1" latinLnBrk="0" hangingPunct="1"/>
             <a:r>
-              <a:rPr lang="en-US" smtClean="0"/>
+              <a:rPr lang="en-US"/>
               <a:t>Fourth level</a:t>
             </a:r>
           </a:p>
           <a:p>
             <a:pPr lvl="4" eaLnBrk="1" latinLnBrk="0" hangingPunct="1"/>
             <a:r>
-              <a:rPr lang="en-US" smtClean="0"/>
+              <a:rPr lang="en-US"/>
               <a:t>Fifth level</a:t>
             </a:r>
             <a:endParaRPr kumimoji="0" lang="en-US"/>
@@ -2374,10 +2388,9 @@
           </a:lstStyle>
           <a:p>
             <a:r>
-              <a:rPr kumimoji="0" lang="en-US" smtClean="0"/>
+              <a:rPr kumimoji="0" lang="en-US"/>
               <a:t>Click to edit Master title style</a:t>
             </a:r>
-            <a:endParaRPr kumimoji="0" lang="en-US"/>
           </a:p>
         </p:txBody>
       </p:sp>
@@ -2434,7 +2447,7 @@
           <a:p>
             <a:pPr lvl="0" eaLnBrk="1" latinLnBrk="0" hangingPunct="1"/>
             <a:r>
-              <a:rPr kumimoji="0" lang="en-US" smtClean="0"/>
+              <a:rPr kumimoji="0" lang="en-US"/>
               <a:t>Click to edit Master text styles</a:t>
             </a:r>
           </a:p>
@@ -2491,7 +2504,7 @@
           <a:p>
             <a:pPr lvl="0" eaLnBrk="1" latinLnBrk="0" hangingPunct="1"/>
             <a:r>
-              <a:rPr kumimoji="0" lang="en-US" smtClean="0"/>
+              <a:rPr kumimoji="0" lang="en-US"/>
               <a:t>Click to edit Master text styles</a:t>
             </a:r>
           </a:p>
@@ -2515,7 +2528,7 @@
             <a:fld id="{1D8BD707-D9CF-40AE-B4C6-C98DA3205C09}" type="datetimeFigureOut">
               <a:rPr lang="en-US" smtClean="0"/>
               <a:pPr/>
-              <a:t>12/14/2020</a:t>
+              <a:t>12/11/2024</a:t>
             </a:fld>
             <a:endParaRPr lang="en-US"/>
           </a:p>
@@ -2586,35 +2599,35 @@
           <a:p>
             <a:pPr lvl="0" eaLnBrk="1" latinLnBrk="0" hangingPunct="1"/>
             <a:r>
-              <a:rPr lang="en-US" smtClean="0"/>
+              <a:rPr lang="en-US"/>
               <a:t>Click to edit Master text styles</a:t>
             </a:r>
           </a:p>
           <a:p>
             <a:pPr lvl="1" eaLnBrk="1" latinLnBrk="0" hangingPunct="1"/>
             <a:r>
-              <a:rPr lang="en-US" smtClean="0"/>
+              <a:rPr lang="en-US"/>
               <a:t>Second level</a:t>
             </a:r>
           </a:p>
           <a:p>
             <a:pPr lvl="2" eaLnBrk="1" latinLnBrk="0" hangingPunct="1"/>
             <a:r>
-              <a:rPr lang="en-US" smtClean="0"/>
+              <a:rPr lang="en-US"/>
               <a:t>Third level</a:t>
             </a:r>
           </a:p>
           <a:p>
             <a:pPr lvl="3" eaLnBrk="1" latinLnBrk="0" hangingPunct="1"/>
             <a:r>
-              <a:rPr lang="en-US" smtClean="0"/>
+              <a:rPr lang="en-US"/>
               <a:t>Fourth level</a:t>
             </a:r>
           </a:p>
           <a:p>
             <a:pPr lvl="4" eaLnBrk="1" latinLnBrk="0" hangingPunct="1"/>
             <a:r>
-              <a:rPr lang="en-US" smtClean="0"/>
+              <a:rPr lang="en-US"/>
               <a:t>Fifth level</a:t>
             </a:r>
             <a:endParaRPr kumimoji="0" lang="en-US"/>
@@ -2643,35 +2656,35 @@
           <a:p>
             <a:pPr lvl="0" eaLnBrk="1" latinLnBrk="0" hangingPunct="1"/>
             <a:r>
-              <a:rPr lang="en-US" smtClean="0"/>
+              <a:rPr lang="en-US"/>
               <a:t>Click to edit Master text styles</a:t>
             </a:r>
           </a:p>
           <a:p>
             <a:pPr lvl="1" eaLnBrk="1" latinLnBrk="0" hangingPunct="1"/>
             <a:r>
-              <a:rPr lang="en-US" smtClean="0"/>
+              <a:rPr lang="en-US"/>
               <a:t>Second level</a:t>
             </a:r>
           </a:p>
           <a:p>
             <a:pPr lvl="2" eaLnBrk="1" latinLnBrk="0" hangingPunct="1"/>
             <a:r>
-              <a:rPr lang="en-US" smtClean="0"/>
+              <a:rPr lang="en-US"/>
               <a:t>Third level</a:t>
             </a:r>
           </a:p>
           <a:p>
             <a:pPr lvl="3" eaLnBrk="1" latinLnBrk="0" hangingPunct="1"/>
             <a:r>
-              <a:rPr lang="en-US" smtClean="0"/>
+              <a:rPr lang="en-US"/>
               <a:t>Fourth level</a:t>
             </a:r>
           </a:p>
           <a:p>
             <a:pPr lvl="4" eaLnBrk="1" latinLnBrk="0" hangingPunct="1"/>
             <a:r>
-              <a:rPr lang="en-US" smtClean="0"/>
+              <a:rPr lang="en-US"/>
               <a:t>Fifth level</a:t>
             </a:r>
             <a:endParaRPr kumimoji="0" lang="en-US"/>
@@ -2724,10 +2737,9 @@
           <a:lstStyle/>
           <a:p>
             <a:r>
-              <a:rPr kumimoji="0" lang="en-US" smtClean="0"/>
+              <a:rPr kumimoji="0" lang="en-US"/>
               <a:t>Click to edit Master title style</a:t>
             </a:r>
-            <a:endParaRPr kumimoji="0" lang="en-US"/>
           </a:p>
         </p:txBody>
       </p:sp>
@@ -2749,7 +2761,7 @@
             <a:fld id="{1D8BD707-D9CF-40AE-B4C6-C98DA3205C09}" type="datetimeFigureOut">
               <a:rPr lang="en-US" smtClean="0"/>
               <a:pPr/>
-              <a:t>12/14/2020</a:t>
+              <a:t>12/11/2024</a:t>
             </a:fld>
             <a:endParaRPr lang="en-US"/>
           </a:p>
@@ -2891,7 +2903,7 @@
             <a:fld id="{1D8BD707-D9CF-40AE-B4C6-C98DA3205C09}" type="datetimeFigureOut">
               <a:rPr lang="en-US" smtClean="0"/>
               <a:pPr/>
-              <a:t>12/14/2020</a:t>
+              <a:t>12/11/2024</a:t>
             </a:fld>
             <a:endParaRPr lang="en-US"/>
           </a:p>
@@ -3086,10 +3098,9 @@
           </a:lstStyle>
           <a:p>
             <a:r>
-              <a:rPr kumimoji="0" lang="en-US" smtClean="0"/>
+              <a:rPr kumimoji="0" lang="en-US"/>
               <a:t>Click to edit Master title style</a:t>
             </a:r>
-            <a:endParaRPr kumimoji="0" lang="en-US"/>
           </a:p>
         </p:txBody>
       </p:sp>
@@ -3146,7 +3157,7 @@
           <a:p>
             <a:pPr lvl="0" eaLnBrk="1" latinLnBrk="0" hangingPunct="1"/>
             <a:r>
-              <a:rPr kumimoji="0" lang="en-US" smtClean="0"/>
+              <a:rPr kumimoji="0" lang="en-US"/>
               <a:t>Click to edit Master text styles</a:t>
             </a:r>
           </a:p>
@@ -3170,7 +3181,7 @@
             <a:fld id="{1D8BD707-D9CF-40AE-B4C6-C98DA3205C09}" type="datetimeFigureOut">
               <a:rPr lang="en-US" smtClean="0"/>
               <a:pPr/>
-              <a:t>12/14/2020</a:t>
+              <a:t>12/11/2024</a:t>
             </a:fld>
             <a:endParaRPr lang="en-US"/>
           </a:p>
@@ -3363,35 +3374,35 @@
           <a:p>
             <a:pPr lvl="0" eaLnBrk="1" latinLnBrk="0" hangingPunct="1"/>
             <a:r>
-              <a:rPr lang="en-US" smtClean="0"/>
+              <a:rPr lang="en-US"/>
               <a:t>Click to edit Master text styles</a:t>
             </a:r>
           </a:p>
           <a:p>
             <a:pPr lvl="1" eaLnBrk="1" latinLnBrk="0" hangingPunct="1"/>
             <a:r>
-              <a:rPr lang="en-US" smtClean="0"/>
+              <a:rPr lang="en-US"/>
               <a:t>Second level</a:t>
             </a:r>
           </a:p>
           <a:p>
             <a:pPr lvl="2" eaLnBrk="1" latinLnBrk="0" hangingPunct="1"/>
             <a:r>
-              <a:rPr lang="en-US" smtClean="0"/>
+              <a:rPr lang="en-US"/>
               <a:t>Third level</a:t>
             </a:r>
           </a:p>
           <a:p>
             <a:pPr lvl="3" eaLnBrk="1" latinLnBrk="0" hangingPunct="1"/>
             <a:r>
-              <a:rPr lang="en-US" smtClean="0"/>
+              <a:rPr lang="en-US"/>
               <a:t>Fourth level</a:t>
             </a:r>
           </a:p>
           <a:p>
             <a:pPr lvl="4" eaLnBrk="1" latinLnBrk="0" hangingPunct="1"/>
             <a:r>
-              <a:rPr lang="en-US" smtClean="0"/>
+              <a:rPr lang="en-US"/>
               <a:t>Fifth level</a:t>
             </a:r>
             <a:endParaRPr kumimoji="0" lang="en-US"/>
@@ -3458,10 +3469,9 @@
           </a:lstStyle>
           <a:p>
             <a:r>
-              <a:rPr kumimoji="0" lang="en-US" smtClean="0"/>
+              <a:rPr kumimoji="0" lang="en-US"/>
               <a:t>Click to edit Master title style</a:t>
             </a:r>
-            <a:endParaRPr kumimoji="0" lang="en-US"/>
           </a:p>
         </p:txBody>
       </p:sp>
@@ -3503,7 +3513,7 @@
           </a:lstStyle>
           <a:p>
             <a:r>
-              <a:rPr kumimoji="0" lang="en-US" smtClean="0"/>
+              <a:rPr kumimoji="0" lang="en-US"/>
               <a:t>Click icon to add picture</a:t>
             </a:r>
             <a:endParaRPr kumimoji="0" lang="en-US" dirty="0"/>
@@ -3550,7 +3560,7 @@
           <a:p>
             <a:pPr lvl="0" eaLnBrk="1" latinLnBrk="0" hangingPunct="1"/>
             <a:r>
-              <a:rPr kumimoji="0" lang="en-US" smtClean="0"/>
+              <a:rPr kumimoji="0" lang="en-US"/>
               <a:t>Click to edit Master text styles</a:t>
             </a:r>
           </a:p>
@@ -3574,7 +3584,7 @@
             <a:fld id="{1D8BD707-D9CF-40AE-B4C6-C98DA3205C09}" type="datetimeFigureOut">
               <a:rPr lang="en-US" smtClean="0"/>
               <a:pPr/>
-              <a:t>12/14/2020</a:t>
+              <a:t>12/11/2024</a:t>
             </a:fld>
             <a:endParaRPr lang="en-US"/>
           </a:p>
@@ -3811,10 +3821,9 @@
           <a:lstStyle/>
           <a:p>
             <a:r>
-              <a:rPr kumimoji="0" lang="en-US" smtClean="0"/>
+              <a:rPr kumimoji="0" lang="en-US"/>
               <a:t>Click to edit Master title style</a:t>
             </a:r>
-            <a:endParaRPr kumimoji="0" lang="en-US"/>
           </a:p>
         </p:txBody>
       </p:sp>
@@ -3845,38 +3854,37 @@
           <a:p>
             <a:pPr lvl="0" eaLnBrk="1" latinLnBrk="0" hangingPunct="1"/>
             <a:r>
-              <a:rPr kumimoji="0" lang="en-US" smtClean="0"/>
+              <a:rPr kumimoji="0" lang="en-US"/>
               <a:t>Click to edit Master text styles</a:t>
             </a:r>
           </a:p>
           <a:p>
             <a:pPr lvl="1" eaLnBrk="1" latinLnBrk="0" hangingPunct="1"/>
             <a:r>
-              <a:rPr kumimoji="0" lang="en-US" smtClean="0"/>
+              <a:rPr kumimoji="0" lang="en-US"/>
               <a:t>Second level</a:t>
             </a:r>
           </a:p>
           <a:p>
             <a:pPr lvl="2" eaLnBrk="1" latinLnBrk="0" hangingPunct="1"/>
             <a:r>
-              <a:rPr kumimoji="0" lang="en-US" smtClean="0"/>
+              <a:rPr kumimoji="0" lang="en-US"/>
               <a:t>Third level</a:t>
             </a:r>
           </a:p>
           <a:p>
             <a:pPr lvl="3" eaLnBrk="1" latinLnBrk="0" hangingPunct="1"/>
             <a:r>
-              <a:rPr kumimoji="0" lang="en-US" smtClean="0"/>
+              <a:rPr kumimoji="0" lang="en-US"/>
               <a:t>Fourth level</a:t>
             </a:r>
           </a:p>
           <a:p>
             <a:pPr lvl="4" eaLnBrk="1" latinLnBrk="0" hangingPunct="1"/>
             <a:r>
-              <a:rPr kumimoji="0" lang="en-US" smtClean="0"/>
+              <a:rPr kumimoji="0" lang="en-US"/>
               <a:t>Fifth level</a:t>
             </a:r>
-            <a:endParaRPr kumimoji="0" lang="en-US"/>
           </a:p>
         </p:txBody>
       </p:sp>
@@ -3914,7 +3922,7 @@
             <a:fld id="{1D8BD707-D9CF-40AE-B4C6-C98DA3205C09}" type="datetimeFigureOut">
               <a:rPr lang="en-US" smtClean="0"/>
               <a:pPr/>
-              <a:t>12/14/2020</a:t>
+              <a:t>12/11/2024</a:t>
             </a:fld>
             <a:endParaRPr lang="en-US"/>
           </a:p>
@@ -4495,20 +4503,20 @@
           <a:lstStyle/>
           <a:p>
             <a:r>
-              <a:rPr lang="en-US" dirty="0" smtClean="0"/>
+              <a:rPr lang="en-US" dirty="0"/>
               <a:t>Messages</a:t>
             </a:r>
             <a:br>
-              <a:rPr lang="en-US" dirty="0" smtClean="0"/>
+              <a:rPr lang="en-US" dirty="0"/>
             </a:br>
             <a:r>
-              <a:rPr lang="en-US" sz="1800" dirty="0" smtClean="0">
+              <a:rPr lang="en-US" sz="1800" dirty="0">
                 <a:hlinkClick r:id="rId3"/>
               </a:rPr>
               <a:t>www.cs.uoi.gr/~zarras/soft-devII.htm</a:t>
             </a:r>
             <a:r>
-              <a:rPr lang="en-US" sz="1800" dirty="0" smtClean="0"/>
+              <a:rPr lang="en-US" sz="1800" dirty="0"/>
               <a:t>    </a:t>
             </a:r>
             <a:endParaRPr lang="el-GR" sz="1800" dirty="0"/>
@@ -4533,21 +4541,21 @@
           <a:lstStyle/>
           <a:p>
             <a:r>
-              <a:rPr lang="en-US" dirty="0" smtClean="0"/>
+              <a:rPr lang="en-US" dirty="0"/>
               <a:t>Sources: M. Fowler </a:t>
             </a:r>
             <a:r>
-              <a:rPr lang="en-US" dirty="0" err="1" smtClean="0"/>
+              <a:rPr lang="en-US" dirty="0" err="1"/>
               <a:t>Refactorings</a:t>
             </a:r>
             <a:r>
-              <a:rPr lang="en-US" dirty="0" smtClean="0"/>
+              <a:rPr lang="en-US" dirty="0"/>
               <a:t> Catalog</a:t>
             </a:r>
           </a:p>
           <a:p>
             <a:r>
-              <a:rPr lang="en-US" dirty="0" smtClean="0"/>
+              <a:rPr lang="en-US" dirty="0"/>
               <a:t>W. Wake Refactoring Workbook</a:t>
             </a:r>
             <a:endParaRPr lang="el-GR" dirty="0"/>
@@ -4559,13 +4567,6 @@
   <p:clrMapOvr>
     <a:masterClrMapping/>
   </p:clrMapOvr>
-  <p:timing>
-    <p:tnLst>
-      <p:par>
-        <p:cTn id="1" dur="indefinite" restart="never" nodeType="tmRoot"/>
-      </p:par>
-    </p:tnLst>
-  </p:timing>
 </p:sld>
 </file>
 
@@ -4602,10 +4603,10 @@
           <a:lstStyle/>
           <a:p>
             <a:r>
-              <a:rPr lang="en-US" dirty="0" smtClean="0"/>
+              <a:rPr lang="en-US" dirty="0"/>
               <a:t>Middle Man</a:t>
             </a:r>
-            <a:endParaRPr lang="el-GR" dirty="0" smtClean="0"/>
+            <a:endParaRPr lang="el-GR" dirty="0"/>
           </a:p>
         </p:txBody>
       </p:sp>
@@ -4631,7 +4632,7 @@
           <a:lstStyle/>
           <a:p>
             <a:r>
-              <a:rPr lang="en-US" b="1" u="sng" dirty="0" smtClean="0">
+              <a:rPr lang="en-US" b="1" u="sng" dirty="0">
                 <a:solidFill>
                   <a:srgbClr val="0070C0"/>
                 </a:solidFill>
@@ -4640,12 +4641,12 @@
             </a:r>
           </a:p>
           <a:p>
-            <a:endParaRPr lang="en-US" dirty="0" smtClean="0"/>
+            <a:endParaRPr lang="en-US" dirty="0"/>
           </a:p>
           <a:p>
             <a:pPr marL="342900" indent="-342900"/>
             <a:r>
-              <a:rPr lang="en-US" b="1" i="1" dirty="0" smtClean="0">
+              <a:rPr lang="en-US" b="1" i="1" dirty="0">
                 <a:solidFill>
                   <a:srgbClr val="0070C0"/>
                 </a:solidFill>
@@ -4653,12 +4654,12 @@
               <a:t>Remove Middle Man </a:t>
             </a:r>
             <a:r>
-              <a:rPr lang="en-US" i="1" dirty="0" smtClean="0"/>
+              <a:rPr lang="en-US" i="1" dirty="0"/>
               <a:t>by having the client call the delegate directly.</a:t>
             </a:r>
           </a:p>
           <a:p>
-            <a:endParaRPr lang="en-US" b="1" dirty="0" smtClean="0"/>
+            <a:endParaRPr lang="en-US" b="1" dirty="0"/>
           </a:p>
         </p:txBody>
       </p:sp>
@@ -4667,13 +4668,6 @@
   <p:clrMapOvr>
     <a:masterClrMapping/>
   </p:clrMapOvr>
-  <p:timing>
-    <p:tnLst>
-      <p:par>
-        <p:cTn id="1" dur="indefinite" restart="never" nodeType="tmRoot"/>
-      </p:par>
-    </p:tnLst>
-  </p:timing>
 </p:sld>
 </file>
 
@@ -4710,10 +4704,10 @@
           <a:lstStyle/>
           <a:p>
             <a:r>
-              <a:rPr lang="en-US" dirty="0" smtClean="0"/>
+              <a:rPr lang="en-US" dirty="0"/>
               <a:t>Remove Middle Man</a:t>
             </a:r>
-            <a:endParaRPr lang="el-GR" dirty="0" smtClean="0"/>
+            <a:endParaRPr lang="el-GR" dirty="0"/>
           </a:p>
         </p:txBody>
       </p:sp>
@@ -4788,13 +4782,6 @@
   <p:clrMapOvr>
     <a:masterClrMapping/>
   </p:clrMapOvr>
-  <p:timing>
-    <p:tnLst>
-      <p:par>
-        <p:cTn id="1" dur="indefinite" restart="never" nodeType="tmRoot"/>
-      </p:par>
-    </p:tnLst>
-  </p:timing>
 </p:sld>
 </file>
 
@@ -4831,10 +4818,10 @@
           <a:lstStyle/>
           <a:p>
             <a:r>
-              <a:rPr lang="en-US" dirty="0" smtClean="0"/>
+              <a:rPr lang="en-US" dirty="0"/>
               <a:t>Remove Middle Man</a:t>
             </a:r>
-            <a:endParaRPr lang="el-GR" dirty="0" smtClean="0"/>
+            <a:endParaRPr lang="el-GR" dirty="0"/>
           </a:p>
         </p:txBody>
       </p:sp>
@@ -4909,13 +4896,6 @@
   <p:clrMapOvr>
     <a:masterClrMapping/>
   </p:clrMapOvr>
-  <p:timing>
-    <p:tnLst>
-      <p:par>
-        <p:cTn id="1" dur="indefinite" restart="never" nodeType="tmRoot"/>
-      </p:par>
-    </p:tnLst>
-  </p:timing>
 </p:sld>
 </file>
 
@@ -4952,10 +4932,10 @@
           <a:lstStyle/>
           <a:p>
             <a:r>
-              <a:rPr lang="en-US" dirty="0" smtClean="0"/>
+              <a:rPr lang="en-US" dirty="0"/>
               <a:t>Middle Man</a:t>
             </a:r>
-            <a:endParaRPr lang="el-GR" dirty="0" smtClean="0"/>
+            <a:endParaRPr lang="el-GR" dirty="0"/>
           </a:p>
         </p:txBody>
       </p:sp>
@@ -4981,7 +4961,7 @@
           <a:lstStyle/>
           <a:p>
             <a:r>
-              <a:rPr lang="en-US" b="1" u="sng" dirty="0" smtClean="0">
+              <a:rPr lang="en-US" b="1" u="sng" dirty="0">
                 <a:solidFill>
                   <a:srgbClr val="0070C0"/>
                 </a:solidFill>
@@ -4990,15 +4970,15 @@
             </a:r>
           </a:p>
           <a:p>
-            <a:endParaRPr lang="en-US" dirty="0" smtClean="0"/>
-          </a:p>
-          <a:p>
-            <a:r>
-              <a:rPr lang="en-US" dirty="0" smtClean="0"/>
+            <a:endParaRPr lang="en-US" dirty="0"/>
+          </a:p>
+          <a:p>
+            <a:r>
+              <a:rPr lang="en-US" dirty="0"/>
               <a:t>If the delegate is </a:t>
             </a:r>
             <a:r>
-              <a:rPr lang="en-US" b="1" dirty="0" smtClean="0">
+              <a:rPr lang="en-US" b="1" dirty="0">
                 <a:solidFill>
                   <a:srgbClr val="FF0000"/>
                 </a:solidFill>
@@ -5006,11 +4986,11 @@
               <a:t>owned</a:t>
             </a:r>
             <a:r>
-              <a:rPr lang="en-US" dirty="0" smtClean="0"/>
+              <a:rPr lang="en-US" dirty="0"/>
               <a:t> by the middle man or is </a:t>
             </a:r>
             <a:r>
-              <a:rPr lang="en-US" dirty="0" smtClean="0">
+              <a:rPr lang="en-US" dirty="0">
                 <a:solidFill>
                   <a:srgbClr val="FF0000"/>
                 </a:solidFill>
@@ -5018,11 +4998,11 @@
               <a:t>immutable</a:t>
             </a:r>
             <a:r>
-              <a:rPr lang="en-US" dirty="0" smtClean="0"/>
+              <a:rPr lang="en-US" dirty="0"/>
               <a:t>, and the </a:t>
             </a:r>
             <a:r>
-              <a:rPr lang="en-US" dirty="0" smtClean="0">
+              <a:rPr lang="en-US" dirty="0">
                 <a:solidFill>
                   <a:srgbClr val="0070C0"/>
                 </a:solidFill>
@@ -5030,11 +5010,11 @@
               <a:t>middle man has behavior to add</a:t>
             </a:r>
             <a:r>
-              <a:rPr lang="en-US" dirty="0" smtClean="0"/>
+              <a:rPr lang="en-US" dirty="0"/>
               <a:t>, and the </a:t>
             </a:r>
             <a:r>
-              <a:rPr lang="en-US" b="1" dirty="0" smtClean="0">
+              <a:rPr lang="en-US" b="1" dirty="0">
                 <a:solidFill>
                   <a:srgbClr val="0070C0"/>
                 </a:solidFill>
@@ -5042,11 +5022,11 @@
               <a:t>middle man can be seen as an example of the delegate</a:t>
             </a:r>
             <a:r>
-              <a:rPr lang="en-US" dirty="0" smtClean="0"/>
+              <a:rPr lang="en-US" dirty="0"/>
               <a:t>, you might </a:t>
             </a:r>
             <a:r>
-              <a:rPr lang="en-US" b="1" i="1" dirty="0" smtClean="0">
+              <a:rPr lang="en-US" b="1" i="1" dirty="0">
                 <a:solidFill>
                   <a:srgbClr val="0070C0"/>
                 </a:solidFill>
@@ -5054,12 +5034,12 @@
               <a:t>Replace Delegation with Inheritance</a:t>
             </a:r>
             <a:r>
-              <a:rPr lang="en-US" i="1" dirty="0" smtClean="0"/>
+              <a:rPr lang="en-US" i="1" dirty="0"/>
               <a:t>.</a:t>
             </a:r>
           </a:p>
           <a:p>
-            <a:endParaRPr lang="en-US" b="1" dirty="0" smtClean="0"/>
+            <a:endParaRPr lang="en-US" b="1" dirty="0"/>
           </a:p>
         </p:txBody>
       </p:sp>
@@ -5068,13 +5048,6 @@
   <p:clrMapOvr>
     <a:masterClrMapping/>
   </p:clrMapOvr>
-  <p:timing>
-    <p:tnLst>
-      <p:par>
-        <p:cTn id="1" dur="indefinite" restart="never" nodeType="tmRoot"/>
-      </p:par>
-    </p:tnLst>
-  </p:timing>
 </p:sld>
 </file>
 
@@ -5116,10 +5089,10 @@
           <a:lstStyle/>
           <a:p>
             <a:r>
-              <a:rPr lang="en-US" dirty="0" smtClean="0"/>
+              <a:rPr lang="en-US" dirty="0"/>
               <a:t>Replace Delegation with Inheritance</a:t>
             </a:r>
-            <a:endParaRPr lang="el-GR" dirty="0" smtClean="0"/>
+            <a:endParaRPr lang="el-GR" dirty="0"/>
           </a:p>
         </p:txBody>
       </p:sp>
@@ -5161,13 +5134,6 @@
   <p:clrMapOvr>
     <a:masterClrMapping/>
   </p:clrMapOvr>
-  <p:timing>
-    <p:tnLst>
-      <p:par>
-        <p:cTn id="1" dur="indefinite" restart="never" nodeType="tmRoot"/>
-      </p:par>
-    </p:tnLst>
-  </p:timing>
 </p:sld>
 </file>
 
@@ -5204,10 +5170,9 @@
           <a:lstStyle/>
           <a:p>
             <a:r>
-              <a:rPr lang="en-US" dirty="0" smtClean="0"/>
+              <a:rPr lang="en-US" dirty="0"/>
               <a:t>Message Chains</a:t>
             </a:r>
-            <a:endParaRPr lang="en-US" dirty="0"/>
           </a:p>
         </p:txBody>
       </p:sp>
@@ -5271,10 +5236,10 @@
           <a:lstStyle/>
           <a:p>
             <a:r>
-              <a:rPr lang="en-US" dirty="0" smtClean="0"/>
+              <a:rPr lang="en-US" dirty="0"/>
               <a:t>Message Chains</a:t>
             </a:r>
-            <a:endParaRPr lang="el-GR" dirty="0" smtClean="0"/>
+            <a:endParaRPr lang="el-GR" dirty="0"/>
           </a:p>
         </p:txBody>
       </p:sp>
@@ -5300,7 +5265,7 @@
           <a:lstStyle/>
           <a:p>
             <a:r>
-              <a:rPr lang="en-US" b="1" u="sng" dirty="0" smtClean="0">
+              <a:rPr lang="en-US" b="1" u="sng" dirty="0">
                 <a:solidFill>
                   <a:srgbClr val="0070C0"/>
                 </a:solidFill>
@@ -5309,15 +5274,15 @@
             </a:r>
           </a:p>
           <a:p>
-            <a:endParaRPr lang="en-US" dirty="0" smtClean="0"/>
-          </a:p>
-          <a:p>
-            <a:r>
-              <a:rPr lang="en-US" dirty="0" smtClean="0"/>
+            <a:endParaRPr lang="en-US" dirty="0"/>
+          </a:p>
+          <a:p>
+            <a:r>
+              <a:rPr lang="en-US" dirty="0"/>
               <a:t>You see calls of the form: </a:t>
             </a:r>
             <a:r>
-              <a:rPr lang="en-US" b="1" dirty="0" err="1" smtClean="0">
+              <a:rPr lang="en-US" b="1" dirty="0" err="1">
                 <a:solidFill>
                   <a:srgbClr val="FF0000"/>
                 </a:solidFill>
@@ -5325,7 +5290,7 @@
               <a:t>a.b</a:t>
             </a:r>
             <a:r>
-              <a:rPr lang="en-US" b="1" dirty="0" smtClean="0">
+              <a:rPr lang="en-US" b="1" dirty="0">
                 <a:solidFill>
                   <a:srgbClr val="FF0000"/>
                 </a:solidFill>
@@ -5334,11 +5299,11 @@
             </a:r>
           </a:p>
           <a:p>
-            <a:endParaRPr lang="en-US" b="1" dirty="0" smtClean="0"/>
-          </a:p>
-          <a:p>
-            <a:r>
-              <a:rPr lang="en-US" b="1" u="sng" dirty="0" smtClean="0">
+            <a:endParaRPr lang="en-US" b="1" dirty="0"/>
+          </a:p>
+          <a:p>
+            <a:r>
+              <a:rPr lang="en-US" b="1" u="sng" dirty="0">
                 <a:solidFill>
                   <a:srgbClr val="0070C0"/>
                 </a:solidFill>
@@ -5347,15 +5312,15 @@
             </a:r>
           </a:p>
           <a:p>
-            <a:endParaRPr lang="en-US" dirty="0" smtClean="0"/>
-          </a:p>
-          <a:p>
-            <a:r>
-              <a:rPr lang="en-US" dirty="0" smtClean="0"/>
+            <a:endParaRPr lang="en-US" dirty="0"/>
+          </a:p>
+          <a:p>
+            <a:r>
+              <a:rPr lang="en-US" dirty="0"/>
               <a:t>An object cooperates with other objects to get things done. That part is OK; the problem is that we’re </a:t>
             </a:r>
             <a:r>
-              <a:rPr lang="en-US" dirty="0" smtClean="0">
+              <a:rPr lang="en-US" dirty="0">
                 <a:solidFill>
                   <a:srgbClr val="0070C0"/>
                 </a:solidFill>
@@ -5363,11 +5328,11 @@
               <a:t>coupled</a:t>
             </a:r>
             <a:r>
-              <a:rPr lang="en-US" dirty="0" smtClean="0"/>
+              <a:rPr lang="en-US" dirty="0"/>
               <a:t> both to the </a:t>
             </a:r>
             <a:r>
-              <a:rPr lang="en-US" dirty="0" smtClean="0">
+              <a:rPr lang="en-US" dirty="0">
                 <a:solidFill>
                   <a:srgbClr val="0070C0"/>
                 </a:solidFill>
@@ -5375,15 +5340,15 @@
               <a:t>objects</a:t>
             </a:r>
             <a:r>
-              <a:rPr lang="en-US" dirty="0" smtClean="0"/>
+              <a:rPr lang="en-US" dirty="0"/>
               <a:t> </a:t>
             </a:r>
             <a:r>
-              <a:rPr lang="en-US" i="1" dirty="0" smtClean="0"/>
+              <a:rPr lang="en-US" i="1" dirty="0"/>
               <a:t>and </a:t>
             </a:r>
             <a:r>
-              <a:rPr lang="en-US" i="1" dirty="0" smtClean="0">
+              <a:rPr lang="en-US" i="1" dirty="0">
                 <a:solidFill>
                   <a:srgbClr val="0070C0"/>
                 </a:solidFill>
@@ -5391,20 +5356,20 @@
               <a:t>the path to get to them</a:t>
             </a:r>
             <a:r>
-              <a:rPr lang="en-US" i="1" dirty="0" smtClean="0"/>
+              <a:rPr lang="en-US" i="1" dirty="0"/>
               <a:t>.</a:t>
             </a:r>
           </a:p>
           <a:p>
-            <a:endParaRPr lang="en-US" dirty="0" smtClean="0"/>
-          </a:p>
-          <a:p>
-            <a:r>
-              <a:rPr lang="en-US" dirty="0" smtClean="0"/>
+            <a:endParaRPr lang="en-US" dirty="0"/>
+          </a:p>
+          <a:p>
+            <a:r>
+              <a:rPr lang="en-US" dirty="0"/>
               <a:t>This sort of coupling goes against two maxims of object-oriented programming: </a:t>
             </a:r>
             <a:r>
-              <a:rPr lang="en-US" b="1" dirty="0" smtClean="0">
+              <a:rPr lang="en-US" b="1" dirty="0">
                 <a:solidFill>
                   <a:srgbClr val="0070C0"/>
                 </a:solidFill>
@@ -5412,11 +5377,11 @@
               <a:t>“Tell, Don’t Ask” </a:t>
             </a:r>
             <a:r>
-              <a:rPr lang="en-US" dirty="0" smtClean="0"/>
+              <a:rPr lang="en-US" dirty="0"/>
               <a:t>and the </a:t>
             </a:r>
             <a:r>
-              <a:rPr lang="en-US" b="1" dirty="0" smtClean="0">
+              <a:rPr lang="en-US" b="1" dirty="0">
                 <a:solidFill>
                   <a:srgbClr val="0070C0"/>
                 </a:solidFill>
@@ -5424,46 +5389,45 @@
               <a:t>Law of Demeter</a:t>
             </a:r>
             <a:r>
-              <a:rPr lang="en-US" dirty="0" smtClean="0"/>
+              <a:rPr lang="en-US" dirty="0"/>
               <a:t>. </a:t>
             </a:r>
           </a:p>
           <a:p>
-            <a:endParaRPr lang="en-US" dirty="0" smtClean="0"/>
+            <a:endParaRPr lang="en-US" dirty="0"/>
           </a:p>
           <a:p>
             <a:pPr lvl="1"/>
             <a:r>
-              <a:rPr lang="en-US" dirty="0" smtClean="0"/>
+              <a:rPr lang="en-US" dirty="0"/>
               <a:t>“Tell, Don’t Ask,” says that instead of </a:t>
             </a:r>
             <a:r>
-              <a:rPr lang="en-US" i="1" dirty="0" smtClean="0"/>
+              <a:rPr lang="en-US" i="1" dirty="0"/>
               <a:t>asking for </a:t>
             </a:r>
             <a:r>
-              <a:rPr lang="en-US" dirty="0" smtClean="0"/>
+              <a:rPr lang="en-US" dirty="0"/>
               <a:t>objects so you can manipulate them, </a:t>
             </a:r>
             <a:r>
-              <a:rPr lang="en-US" i="1" dirty="0" smtClean="0"/>
+              <a:rPr lang="en-US" i="1" dirty="0"/>
               <a:t>tell them to just do the manipulation for you. </a:t>
             </a:r>
           </a:p>
           <a:p>
-            <a:endParaRPr lang="en-US" i="1" dirty="0" smtClean="0"/>
+            <a:endParaRPr lang="en-US" i="1" dirty="0"/>
           </a:p>
           <a:p>
             <a:pPr lvl="1"/>
             <a:r>
-              <a:rPr lang="en-US" i="1" dirty="0" smtClean="0"/>
+              <a:rPr lang="en-US" i="1" dirty="0"/>
               <a:t>It’s </a:t>
             </a:r>
             <a:r>
-              <a:rPr lang="en-US" dirty="0" smtClean="0"/>
+              <a:rPr lang="en-US" dirty="0"/>
               <a:t>phrased even more clearly in the Law of Demeter a method shouldn’t talk to strangers. </a:t>
             </a:r>
-            <a:endParaRPr lang="en-US" dirty="0"/>
           </a:p>
         </p:txBody>
       </p:sp>
@@ -5472,13 +5436,6 @@
   <p:clrMapOvr>
     <a:masterClrMapping/>
   </p:clrMapOvr>
-  <p:timing>
-    <p:tnLst>
-      <p:par>
-        <p:cTn id="1" dur="indefinite" restart="never" nodeType="tmRoot"/>
-      </p:par>
-    </p:tnLst>
-  </p:timing>
 </p:sld>
 </file>
 
@@ -5515,10 +5472,10 @@
           <a:lstStyle/>
           <a:p>
             <a:r>
-              <a:rPr lang="en-US" dirty="0" smtClean="0"/>
+              <a:rPr lang="en-US" dirty="0"/>
               <a:t>Message Chains</a:t>
             </a:r>
-            <a:endParaRPr lang="el-GR" dirty="0" smtClean="0"/>
+            <a:endParaRPr lang="el-GR" dirty="0"/>
           </a:p>
         </p:txBody>
       </p:sp>
@@ -5544,7 +5501,7 @@
           <a:lstStyle/>
           <a:p>
             <a:r>
-              <a:rPr lang="en-US" b="1" u="sng" dirty="0" smtClean="0">
+              <a:rPr lang="en-US" b="1" u="sng" dirty="0">
                 <a:solidFill>
                   <a:srgbClr val="0070C0"/>
                 </a:solidFill>
@@ -5553,16 +5510,16 @@
             </a:r>
           </a:p>
           <a:p>
-            <a:endParaRPr lang="en-US" dirty="0" smtClean="0"/>
+            <a:endParaRPr lang="en-US" dirty="0"/>
           </a:p>
           <a:p>
             <a:pPr marL="342900" indent="-342900"/>
             <a:r>
-              <a:rPr lang="en-US" dirty="0" smtClean="0"/>
+              <a:rPr lang="en-US" dirty="0"/>
               <a:t>Use </a:t>
             </a:r>
             <a:r>
-              <a:rPr lang="en-US" b="1" i="1" dirty="0" smtClean="0">
+              <a:rPr lang="en-US" b="1" i="1" dirty="0">
                 <a:solidFill>
                   <a:srgbClr val="0070C0"/>
                 </a:solidFill>
@@ -5570,23 +5527,23 @@
               <a:t>Hide Delegate </a:t>
             </a:r>
             <a:r>
-              <a:rPr lang="en-US" i="1" dirty="0" smtClean="0"/>
+              <a:rPr lang="en-US" i="1" dirty="0"/>
               <a:t>to make the method depend on one object only. (So, rather </a:t>
             </a:r>
             <a:r>
-              <a:rPr lang="en-US" dirty="0" smtClean="0"/>
+              <a:rPr lang="en-US" dirty="0"/>
               <a:t>than </a:t>
             </a:r>
             <a:r>
-              <a:rPr lang="en-US" dirty="0" err="1" smtClean="0"/>
+              <a:rPr lang="en-US" dirty="0" err="1"/>
               <a:t>a.b</a:t>
             </a:r>
             <a:r>
-              <a:rPr lang="en-US" dirty="0" smtClean="0"/>
+              <a:rPr lang="en-US" dirty="0"/>
               <a:t>().c().d(), </a:t>
             </a:r>
             <a:r>
-              <a:rPr lang="en-US" b="1" dirty="0" smtClean="0">
+              <a:rPr lang="en-US" b="1" dirty="0">
                 <a:solidFill>
                   <a:srgbClr val="FF0000"/>
                 </a:solidFill>
@@ -5594,12 +5551,12 @@
               <a:t>put a d() method on the a object</a:t>
             </a:r>
             <a:r>
-              <a:rPr lang="en-US" dirty="0" smtClean="0"/>
+              <a:rPr lang="en-US" dirty="0"/>
               <a:t>.)</a:t>
             </a:r>
           </a:p>
           <a:p>
-            <a:endParaRPr lang="en-US" b="1" dirty="0" smtClean="0"/>
+            <a:endParaRPr lang="en-US" b="1" dirty="0"/>
           </a:p>
         </p:txBody>
       </p:sp>
@@ -5609,13 +5566,6 @@
     <a:masterClrMapping/>
   </p:clrMapOvr>
   <p:transition/>
-  <p:timing>
-    <p:tnLst>
-      <p:par>
-        <p:cTn id="1" dur="indefinite" restart="never" nodeType="tmRoot"/>
-      </p:par>
-    </p:tnLst>
-  </p:timing>
 </p:sld>
 </file>
 
@@ -5652,10 +5602,10 @@
           <a:lstStyle/>
           <a:p>
             <a:r>
-              <a:rPr lang="en-US" dirty="0" smtClean="0"/>
+              <a:rPr lang="en-US" dirty="0"/>
               <a:t>Message Chains</a:t>
             </a:r>
-            <a:endParaRPr lang="el-GR" dirty="0" smtClean="0"/>
+            <a:endParaRPr lang="el-GR" dirty="0"/>
           </a:p>
         </p:txBody>
       </p:sp>
@@ -5681,7 +5631,7 @@
           <a:lstStyle/>
           <a:p>
             <a:r>
-              <a:rPr lang="en-US" b="1" u="sng" dirty="0" smtClean="0">
+              <a:rPr lang="en-US" b="1" u="sng" dirty="0">
                 <a:solidFill>
                   <a:srgbClr val="0070C0"/>
                 </a:solidFill>
@@ -5690,16 +5640,16 @@
             </a:r>
           </a:p>
           <a:p>
-            <a:endParaRPr lang="en-US" dirty="0" smtClean="0"/>
+            <a:endParaRPr lang="en-US" dirty="0"/>
           </a:p>
           <a:p>
             <a:pPr marL="342900" indent="-342900"/>
             <a:r>
-              <a:rPr lang="en-US" dirty="0" smtClean="0"/>
+              <a:rPr lang="en-US" dirty="0"/>
               <a:t>If the </a:t>
             </a:r>
             <a:r>
-              <a:rPr lang="en-US" b="1" dirty="0" smtClean="0">
+              <a:rPr lang="en-US" b="1" dirty="0">
                 <a:solidFill>
                   <a:srgbClr val="0070C0"/>
                 </a:solidFill>
@@ -5707,11 +5657,11 @@
               <a:t>manipulations</a:t>
             </a:r>
             <a:r>
-              <a:rPr lang="en-US" dirty="0" smtClean="0"/>
+              <a:rPr lang="en-US" dirty="0"/>
               <a:t> actually belong on the </a:t>
             </a:r>
             <a:r>
-              <a:rPr lang="en-US" b="1" dirty="0" smtClean="0">
+              <a:rPr lang="en-US" b="1" dirty="0">
                 <a:solidFill>
                   <a:srgbClr val="0070C0"/>
                 </a:solidFill>
@@ -5719,11 +5669,11 @@
               <a:t>target object </a:t>
             </a:r>
             <a:r>
-              <a:rPr lang="en-US" dirty="0" smtClean="0"/>
+              <a:rPr lang="en-US" dirty="0"/>
               <a:t>(</a:t>
             </a:r>
             <a:r>
-              <a:rPr lang="en-US" dirty="0" smtClean="0">
+              <a:rPr lang="en-US" dirty="0">
                 <a:solidFill>
                   <a:srgbClr val="FF0000"/>
                 </a:solidFill>
@@ -5731,11 +5681,11 @@
               <a:t>the one at the end of the chain</a:t>
             </a:r>
             <a:r>
-              <a:rPr lang="en-US" dirty="0" smtClean="0"/>
+              <a:rPr lang="en-US" dirty="0"/>
               <a:t>), use </a:t>
             </a:r>
             <a:r>
-              <a:rPr lang="en-US" i="1" dirty="0" smtClean="0">
+              <a:rPr lang="en-US" i="1" dirty="0">
                 <a:solidFill>
                   <a:srgbClr val="0070C0"/>
                 </a:solidFill>
@@ -5743,11 +5693,11 @@
               <a:t>Extract Method </a:t>
             </a:r>
             <a:r>
-              <a:rPr lang="en-US" i="1" dirty="0" smtClean="0"/>
+              <a:rPr lang="en-US" i="1" dirty="0"/>
               <a:t>and </a:t>
             </a:r>
             <a:r>
-              <a:rPr lang="en-US" i="1" dirty="0" smtClean="0">
+              <a:rPr lang="en-US" i="1" dirty="0">
                 <a:solidFill>
                   <a:srgbClr val="0070C0"/>
                 </a:solidFill>
@@ -5755,12 +5705,12 @@
               <a:t>Move Method </a:t>
             </a:r>
             <a:r>
-              <a:rPr lang="en-US" i="1" dirty="0" smtClean="0"/>
+              <a:rPr lang="en-US" i="1" dirty="0"/>
               <a:t>to put them there.</a:t>
             </a:r>
           </a:p>
           <a:p>
-            <a:endParaRPr lang="en-US" b="1" dirty="0" smtClean="0"/>
+            <a:endParaRPr lang="en-US" b="1" dirty="0"/>
           </a:p>
         </p:txBody>
       </p:sp>
@@ -5770,13 +5720,6 @@
     <a:masterClrMapping/>
   </p:clrMapOvr>
   <p:transition/>
-  <p:timing>
-    <p:tnLst>
-      <p:par>
-        <p:cTn id="1" dur="indefinite" restart="never" nodeType="tmRoot"/>
-      </p:par>
-    </p:tnLst>
-  </p:timing>
 </p:sld>
 </file>
 
@@ -5813,10 +5756,10 @@
           <a:lstStyle/>
           <a:p>
             <a:r>
-              <a:rPr lang="en-US" dirty="0" smtClean="0"/>
+              <a:rPr lang="en-US" dirty="0"/>
               <a:t>Hide Delegate</a:t>
             </a:r>
-            <a:endParaRPr lang="el-GR" dirty="0" smtClean="0"/>
+            <a:endParaRPr lang="el-GR" dirty="0"/>
           </a:p>
         </p:txBody>
       </p:sp>
@@ -5891,13 +5834,6 @@
   <p:clrMapOvr>
     <a:masterClrMapping/>
   </p:clrMapOvr>
-  <p:timing>
-    <p:tnLst>
-      <p:par>
-        <p:cTn id="1" dur="indefinite" restart="never" nodeType="tmRoot"/>
-      </p:par>
-    </p:tnLst>
-  </p:timing>
 </p:sld>
 </file>
 
@@ -5934,10 +5870,10 @@
           <a:lstStyle/>
           <a:p>
             <a:r>
-              <a:rPr lang="en-US" dirty="0" smtClean="0"/>
+              <a:rPr lang="en-US" dirty="0"/>
               <a:t>Hide Delegate</a:t>
             </a:r>
-            <a:endParaRPr lang="el-GR" dirty="0" smtClean="0"/>
+            <a:endParaRPr lang="el-GR" dirty="0"/>
           </a:p>
         </p:txBody>
       </p:sp>
@@ -6012,13 +5948,6 @@
   <p:clrMapOvr>
     <a:masterClrMapping/>
   </p:clrMapOvr>
-  <p:timing>
-    <p:tnLst>
-      <p:par>
-        <p:cTn id="1" dur="indefinite" restart="never" nodeType="tmRoot"/>
-      </p:par>
-    </p:tnLst>
-  </p:timing>
 </p:sld>
 </file>
 
@@ -6055,10 +5984,9 @@
           <a:lstStyle/>
           <a:p>
             <a:r>
-              <a:rPr lang="en-US" dirty="0" smtClean="0"/>
+              <a:rPr lang="en-US" dirty="0"/>
               <a:t>Middle Man</a:t>
             </a:r>
-            <a:endParaRPr lang="en-US" dirty="0"/>
           </a:p>
         </p:txBody>
       </p:sp>
@@ -6122,10 +6050,10 @@
           <a:lstStyle/>
           <a:p>
             <a:r>
-              <a:rPr lang="en-US" dirty="0" smtClean="0"/>
+              <a:rPr lang="en-US" dirty="0"/>
               <a:t>Middle Man</a:t>
             </a:r>
-            <a:endParaRPr lang="el-GR" dirty="0" smtClean="0"/>
+            <a:endParaRPr lang="el-GR" dirty="0"/>
           </a:p>
         </p:txBody>
       </p:sp>
@@ -6151,7 +6079,7 @@
           <a:lstStyle/>
           <a:p>
             <a:r>
-              <a:rPr lang="en-US" b="1" u="sng" dirty="0" smtClean="0">
+              <a:rPr lang="en-US" b="1" u="sng" dirty="0">
                 <a:solidFill>
                   <a:srgbClr val="0070C0"/>
                 </a:solidFill>
@@ -6160,11 +6088,11 @@
             </a:r>
           </a:p>
           <a:p>
-            <a:endParaRPr lang="en-US" b="1" dirty="0" smtClean="0"/>
-          </a:p>
-          <a:p>
-            <a:r>
-              <a:rPr lang="en-US" dirty="0" smtClean="0">
+            <a:endParaRPr lang="en-US" b="1" dirty="0"/>
+          </a:p>
+          <a:p>
+            <a:r>
+              <a:rPr lang="en-US" dirty="0">
                 <a:solidFill>
                   <a:srgbClr val="FF0000"/>
                 </a:solidFill>
@@ -6172,11 +6100,11 @@
               <a:t>Most methods</a:t>
             </a:r>
             <a:r>
-              <a:rPr lang="en-US" dirty="0" smtClean="0"/>
+              <a:rPr lang="en-US" dirty="0"/>
               <a:t> of a class </a:t>
             </a:r>
             <a:r>
-              <a:rPr lang="en-US" dirty="0" smtClean="0">
+              <a:rPr lang="en-US" dirty="0">
                 <a:solidFill>
                   <a:srgbClr val="FF0000"/>
                 </a:solidFill>
@@ -6184,11 +6112,11 @@
               <a:t>call</a:t>
             </a:r>
             <a:r>
-              <a:rPr lang="en-US" dirty="0" smtClean="0"/>
+              <a:rPr lang="en-US" dirty="0"/>
               <a:t> the </a:t>
             </a:r>
             <a:r>
-              <a:rPr lang="en-US" dirty="0" smtClean="0">
+              <a:rPr lang="en-US" dirty="0">
                 <a:solidFill>
                   <a:srgbClr val="FF0000"/>
                 </a:solidFill>
@@ -6196,31 +6124,31 @@
               <a:t>same or a similar method</a:t>
             </a:r>
             <a:r>
-              <a:rPr lang="en-US" dirty="0" smtClean="0"/>
+              <a:rPr lang="en-US" dirty="0"/>
               <a:t> on another object: </a:t>
             </a:r>
           </a:p>
           <a:p>
             <a:pPr lvl="1"/>
             <a:r>
-              <a:rPr lang="en-US" dirty="0" smtClean="0"/>
+              <a:rPr lang="en-US" dirty="0"/>
               <a:t>f() {</a:t>
             </a:r>
             <a:r>
-              <a:rPr lang="en-US" dirty="0" err="1" smtClean="0"/>
+              <a:rPr lang="en-US" dirty="0" err="1"/>
               <a:t>delegate.f</a:t>
             </a:r>
             <a:r>
-              <a:rPr lang="en-US" dirty="0" smtClean="0"/>
+              <a:rPr lang="en-US" dirty="0"/>
               <a:t>();}</a:t>
             </a:r>
           </a:p>
           <a:p>
-            <a:endParaRPr lang="en-US" b="1" dirty="0" smtClean="0"/>
-          </a:p>
-          <a:p>
-            <a:r>
-              <a:rPr lang="en-US" b="1" u="sng" dirty="0" smtClean="0">
+            <a:endParaRPr lang="en-US" b="1" dirty="0"/>
+          </a:p>
+          <a:p>
+            <a:r>
+              <a:rPr lang="en-US" b="1" u="sng" dirty="0">
                 <a:solidFill>
                   <a:srgbClr val="0070C0"/>
                 </a:solidFill>
@@ -6229,15 +6157,15 @@
             </a:r>
           </a:p>
           <a:p>
-            <a:endParaRPr lang="en-US" dirty="0" smtClean="0"/>
-          </a:p>
-          <a:p>
-            <a:r>
-              <a:rPr lang="en-US" dirty="0" smtClean="0"/>
+            <a:endParaRPr lang="en-US" dirty="0"/>
+          </a:p>
+          <a:p>
+            <a:r>
+              <a:rPr lang="en-US" dirty="0"/>
               <a:t>One way this happens is from applying </a:t>
             </a:r>
             <a:r>
-              <a:rPr lang="en-US" dirty="0" smtClean="0">
+              <a:rPr lang="en-US" dirty="0">
                 <a:solidFill>
                   <a:srgbClr val="0070C0"/>
                 </a:solidFill>
@@ -6245,19 +6173,19 @@
               <a:t>Hide Delegate</a:t>
             </a:r>
             <a:r>
-              <a:rPr lang="en-US" dirty="0" smtClean="0"/>
+              <a:rPr lang="en-US" dirty="0"/>
               <a:t> to address </a:t>
             </a:r>
             <a:r>
-              <a:rPr lang="en-US" b="1" dirty="0" smtClean="0"/>
+              <a:rPr lang="en-US" b="1" dirty="0"/>
               <a:t>Message Chains</a:t>
             </a:r>
             <a:r>
-              <a:rPr lang="en-US" dirty="0" smtClean="0"/>
+              <a:rPr lang="en-US" dirty="0"/>
               <a:t>. Perhaps other </a:t>
             </a:r>
             <a:r>
-              <a:rPr lang="en-US" dirty="0" smtClean="0">
+              <a:rPr lang="en-US" dirty="0">
                 <a:solidFill>
                   <a:srgbClr val="0070C0"/>
                 </a:solidFill>
@@ -6265,11 +6193,11 @@
               <a:t>features have moved out </a:t>
             </a:r>
             <a:r>
-              <a:rPr lang="en-US" dirty="0" smtClean="0"/>
+              <a:rPr lang="en-US" dirty="0"/>
               <a:t>since then, and we’re </a:t>
             </a:r>
             <a:r>
-              <a:rPr lang="en-US" dirty="0" smtClean="0">
+              <a:rPr lang="en-US" dirty="0">
                 <a:solidFill>
                   <a:srgbClr val="0070C0"/>
                 </a:solidFill>
@@ -6277,7 +6205,7 @@
               <a:t>left with mostly delegating methods</a:t>
             </a:r>
             <a:r>
-              <a:rPr lang="en-US" dirty="0" smtClean="0"/>
+              <a:rPr lang="en-US" dirty="0"/>
               <a:t>.</a:t>
             </a:r>
           </a:p>
@@ -6288,13 +6216,6 @@
   <p:clrMapOvr>
     <a:masterClrMapping/>
   </p:clrMapOvr>
-  <p:timing>
-    <p:tnLst>
-      <p:par>
-        <p:cTn id="1" dur="indefinite" restart="never" nodeType="tmRoot"/>
-      </p:par>
-    </p:tnLst>
-  </p:timing>
 </p:sld>
 </file>
 
